--- a/samples/sample-office.pptx
+++ b/samples/sample-office.pptx
@@ -921,9 +921,7 @@
             <a:r>
               <a:rPr lang="en-US" sz="1900" b="1" dirty="0">
                 <a:solidFill>
-                  <a:srgbClr val="FFFFFF">
-                    <a:alpha val="0"/>
-                  </a:srgbClr>
+                  <a:srgbClr val="000000"/>
                 </a:solidFill>
               </a:rPr>
               <a:t>本地化转换测试</a:t>
